--- a/marketing/templates/Graphic Asset Templates.pptx
+++ b/marketing/templates/Graphic Asset Templates.pptx
@@ -599,8 +599,8 @@
                   <a:srgbClr val="0FC03E"/>
                 </a:solidFill>
                 <a:effectLst/>
-                <a:latin typeface="Mona Sans Mono VF" pitchFamily="2" charset="0"/>
-                <a:cs typeface="Mona Sans Mono VF" pitchFamily="2" charset="0"/>
+                <a:latin typeface="Consolas" pitchFamily="2" charset="0"/>
+                <a:cs typeface="Consolas" pitchFamily="2" charset="0"/>
               </a:defRPr>
             </a:lvl1pPr>
           </a:lstStyle>
@@ -612,7 +612,7 @@
                   <a:srgbClr val="0FC03E"/>
                 </a:solidFill>
                 <a:effectLst/>
-                <a:latin typeface="Mona Sans Mono VF" pitchFamily="2" charset="0"/>
+                <a:latin typeface="Consolas" pitchFamily="2" charset="0"/>
               </a:rPr>
               <a:t>[CITY]</a:t>
             </a:r>
@@ -622,7 +622,7 @@
                   <a:srgbClr val="000000"/>
                 </a:solidFill>
                 <a:effectLst/>
-                <a:latin typeface="Mona Sans Mono VF" pitchFamily="2" charset="0"/>
+                <a:latin typeface="Consolas" pitchFamily="2" charset="0"/>
               </a:rPr>
               <a:t>​</a:t>
             </a:r>
@@ -662,8 +662,8 @@
                   <a:srgbClr val="8E9891"/>
                 </a:solidFill>
                 <a:effectLst/>
-                <a:latin typeface="Mona Sans Mono VF" pitchFamily="2" charset="0"/>
-                <a:cs typeface="Mona Sans Mono VF" pitchFamily="2" charset="0"/>
+                <a:latin typeface="Consolas" pitchFamily="2" charset="0"/>
+                <a:cs typeface="Consolas" pitchFamily="2" charset="0"/>
               </a:defRPr>
             </a:lvl1pPr>
           </a:lstStyle>
@@ -675,7 +675,7 @@
                   <a:srgbClr val="8E9891"/>
                 </a:solidFill>
                 <a:effectLst/>
-                <a:latin typeface="Mona Sans Mono VF" pitchFamily="2" charset="0"/>
+                <a:latin typeface="Consolas" pitchFamily="2" charset="0"/>
               </a:rPr>
               <a:t>[DATE]</a:t>
             </a:r>
@@ -685,7 +685,7 @@
                   <a:srgbClr val="000000"/>
                 </a:solidFill>
                 <a:effectLst/>
-                <a:latin typeface="Mona Sans Mono VF" pitchFamily="2" charset="0"/>
+                <a:latin typeface="Consolas" pitchFamily="2" charset="0"/>
               </a:rPr>
               <a:t>​</a:t>
             </a:r>
@@ -798,8 +798,8 @@
                   <a:srgbClr val="0FC03E"/>
                 </a:solidFill>
                 <a:effectLst/>
-                <a:latin typeface="Mona Sans Mono VF" pitchFamily="2" charset="0"/>
-                <a:cs typeface="Mona Sans Mono VF" pitchFamily="2" charset="0"/>
+                <a:latin typeface="Consolas" pitchFamily="2" charset="0"/>
+                <a:cs typeface="Consolas" pitchFamily="2" charset="0"/>
               </a:defRPr>
             </a:lvl1pPr>
           </a:lstStyle>
@@ -844,8 +844,8 @@
                   <a:srgbClr val="8E9891"/>
                 </a:solidFill>
                 <a:effectLst/>
-                <a:latin typeface="Mona Sans Mono VF" pitchFamily="2" charset="0"/>
-                <a:cs typeface="Mona Sans Mono VF" pitchFamily="2" charset="0"/>
+                <a:latin typeface="Consolas" pitchFamily="2" charset="0"/>
+                <a:cs typeface="Consolas" pitchFamily="2" charset="0"/>
               </a:defRPr>
             </a:lvl1pPr>
           </a:lstStyle>
@@ -965,8 +965,8 @@
                   <a:srgbClr val="0FC03E"/>
                 </a:solidFill>
                 <a:effectLst/>
-                <a:latin typeface="Mona Sans Mono VF" pitchFamily="2" charset="0"/>
-                <a:cs typeface="Mona Sans Mono VF" pitchFamily="2" charset="0"/>
+                <a:latin typeface="Consolas" pitchFamily="2" charset="0"/>
+                <a:cs typeface="Consolas" pitchFamily="2" charset="0"/>
               </a:defRPr>
             </a:lvl1pPr>
           </a:lstStyle>
@@ -1013,8 +1013,8 @@
                   <a:srgbClr val="8E9891"/>
                 </a:solidFill>
                 <a:effectLst/>
-                <a:latin typeface="Mona Sans Mono VF" pitchFamily="2" charset="0"/>
-                <a:cs typeface="Mona Sans Mono VF" pitchFamily="2" charset="0"/>
+                <a:latin typeface="Consolas" pitchFamily="2" charset="0"/>
+                <a:cs typeface="Consolas" pitchFamily="2" charset="0"/>
               </a:defRPr>
             </a:lvl1pPr>
           </a:lstStyle>
@@ -1138,8 +1138,8 @@
                   <a:srgbClr val="0FC03E"/>
                 </a:solidFill>
                 <a:effectLst/>
-                <a:latin typeface="Mona Sans Mono VF" pitchFamily="2" charset="0"/>
-                <a:cs typeface="Mona Sans Mono VF" pitchFamily="2" charset="0"/>
+                <a:latin typeface="Consolas" pitchFamily="2" charset="0"/>
+                <a:cs typeface="Consolas" pitchFamily="2" charset="0"/>
               </a:defRPr>
             </a:lvl1pPr>
           </a:lstStyle>
@@ -1186,8 +1186,8 @@
                   <a:srgbClr val="8E9891"/>
                 </a:solidFill>
                 <a:effectLst/>
-                <a:latin typeface="Mona Sans Mono VF" pitchFamily="2" charset="0"/>
-                <a:cs typeface="Mona Sans Mono VF" pitchFamily="2" charset="0"/>
+                <a:latin typeface="Consolas" pitchFamily="2" charset="0"/>
+                <a:cs typeface="Consolas" pitchFamily="2" charset="0"/>
               </a:defRPr>
             </a:lvl1pPr>
           </a:lstStyle>
@@ -1336,8 +1336,8 @@
                 <a:solidFill>
                   <a:srgbClr val="0FC03E"/>
                 </a:solidFill>
-                <a:latin typeface="Mona Sans Mono VF" pitchFamily="2" charset="0"/>
-                <a:cs typeface="Mona Sans Mono VF" pitchFamily="2" charset="0"/>
+                <a:latin typeface="Consolas" pitchFamily="2" charset="0"/>
+                <a:cs typeface="Consolas" pitchFamily="2" charset="0"/>
               </a:defRPr>
             </a:lvl1pPr>
           </a:lstStyle>
@@ -1383,8 +1383,8 @@
                 <a:solidFill>
                   <a:srgbClr val="0FC03E"/>
                 </a:solidFill>
-                <a:latin typeface="Mona Sans Mono VF" pitchFamily="2" charset="0"/>
-                <a:cs typeface="Mona Sans Mono VF" pitchFamily="2" charset="0"/>
+                <a:latin typeface="Consolas" pitchFamily="2" charset="0"/>
+                <a:cs typeface="Consolas" pitchFamily="2" charset="0"/>
               </a:defRPr>
             </a:lvl1pPr>
           </a:lstStyle>
@@ -1430,8 +1430,8 @@
                 <a:solidFill>
                   <a:srgbClr val="0FC03E"/>
                 </a:solidFill>
-                <a:latin typeface="Mona Sans Mono VF" pitchFamily="2" charset="0"/>
-                <a:cs typeface="Mona Sans Mono VF" pitchFamily="2" charset="0"/>
+                <a:latin typeface="Consolas" pitchFamily="2" charset="0"/>
+                <a:cs typeface="Consolas" pitchFamily="2" charset="0"/>
               </a:defRPr>
             </a:lvl1pPr>
           </a:lstStyle>
@@ -1477,8 +1477,8 @@
                 <a:solidFill>
                   <a:srgbClr val="8E9891"/>
                 </a:solidFill>
-                <a:latin typeface="Mona Sans Mono VF" pitchFamily="2" charset="0"/>
-                <a:cs typeface="Mona Sans Mono VF" pitchFamily="2" charset="0"/>
+                <a:latin typeface="Consolas" pitchFamily="2" charset="0"/>
+                <a:cs typeface="Consolas" pitchFamily="2" charset="0"/>
               </a:defRPr>
             </a:lvl1pPr>
           </a:lstStyle>
